--- a/Формирование отчета по санитарной очистке населенных пуктов.pptx
+++ b/Формирование отчета по санитарной очистке населенных пуктов.pptx
@@ -110,6 +110,11 @@
       </a:defRPr>
     </a:lvl9pPr>
   </p:defaultTextStyle>
+  <p:extLst>
+    <p:ext uri="{EFAFB233-063F-42B5-8137-9DF3F51BA10A}">
+      <p15:sldGuideLst xmlns:p15="http://schemas.microsoft.com/office/powerpoint/2012/main"/>
+    </p:ext>
+  </p:extLst>
 </p:presentation>
 </file>
 
@@ -4221,7 +4226,7 @@
             </a:pPr>
             <a:r>
               <a:rPr lang="ru-RU" dirty="0"/>
-              <a:t>   В рамках данной работы было реализованно заполение раздела №</a:t>
+              <a:t>   В рамках данной работы было реализованно заполнение раздела №</a:t>
             </a:r>
             <a:r>
               <a:rPr lang="en-US" dirty="0"/>
@@ -5391,7 +5396,29 @@
                   </a:schemeClr>
                 </a:solidFill>
               </a:rPr>
-              <a:t>  Реализована в виде таблицы с возможностью выбрать область, район и организацию, от чьего лица идет заполнение. По окончанию работы необзодимо нажать кнопку </a:t>
+              <a:t>  Реализована в виде таблицы с возможностью выбрать область, район и организацию, от чьего лица идет заполнение. По окончанию </a:t>
+            </a:r>
+            <a:r>
+              <a:rPr lang="ru-RU" sz="1400">
+                <a:solidFill>
+                  <a:schemeClr val="tx1">
+                    <a:lumMod val="75000"/>
+                    <a:lumOff val="25000"/>
+                  </a:schemeClr>
+                </a:solidFill>
+              </a:rPr>
+              <a:t>работы необходимо </a:t>
+            </a:r>
+            <a:r>
+              <a:rPr lang="ru-RU" sz="1400" dirty="0">
+                <a:solidFill>
+                  <a:schemeClr val="tx1">
+                    <a:lumMod val="75000"/>
+                    <a:lumOff val="25000"/>
+                  </a:schemeClr>
+                </a:solidFill>
+              </a:rPr>
+              <a:t>нажать кнопку </a:t>
             </a:r>
             <a:r>
               <a:rPr lang="en-US" sz="1400" dirty="0">

--- a/Формирование отчета по санитарной очистке населенных пуктов.pptx
+++ b/Формирование отчета по санитарной очистке населенных пуктов.pptx
@@ -3837,7 +3837,7 @@
           <a:p>
             <a:r>
               <a:rPr lang="ru-RU" sz="6600" dirty="0"/>
-              <a:t>Формирование отчета по санитарной очистке населенных пуктов</a:t>
+              <a:t>Формирование отчета по санитарной очистке населенных пунктов</a:t>
             </a:r>
             <a:endParaRPr lang="en-US" sz="6600" dirty="0"/>
           </a:p>
